--- a/SSF/水票.pptx
+++ b/SSF/水票.pptx
@@ -112,7 +112,7 @@
             <a:srgbClr val="A4A3A4"/>
           </p15:clr>
         </p15:guide>
-        <p15:guide id="2" pos="2381" userDrawn="1">
+        <p15:guide id="2" pos="2380" userDrawn="1">
           <p15:clr>
             <a:srgbClr val="A4A3A4"/>
           </p15:clr>
@@ -2769,7 +2769,7 @@
         <a:spcAft>
           <a:spcPts val="1000"/>
         </a:spcAft>
-        <a:buFont typeface="Arial" panose="020B0604020202020204" pitchFamily="34" charset="0"/>
+        <a:buFont typeface="Arial" panose="020B0704020202020204" pitchFamily="34" charset="0"/>
         <a:buChar char="●"/>
         <a:defRPr sz="1490" u="none" strike="noStrike" kern="1200" cap="none" spc="150" normalizeH="0" baseline="0">
           <a:solidFill>
@@ -2794,7 +2794,7 @@
         <a:spcAft>
           <a:spcPts val="600"/>
         </a:spcAft>
-        <a:buFont typeface="Arial" panose="020B0604020202020204" pitchFamily="34" charset="0"/>
+        <a:buFont typeface="Arial" panose="020B0704020202020204" pitchFamily="34" charset="0"/>
         <a:buChar char="●"/>
         <a:tabLst>
           <a:tab pos="1330960" algn="l"/>
@@ -2825,7 +2825,7 @@
         <a:spcAft>
           <a:spcPts val="600"/>
         </a:spcAft>
-        <a:buFont typeface="Arial" panose="020B0604020202020204" pitchFamily="34" charset="0"/>
+        <a:buFont typeface="Arial" panose="020B0704020202020204" pitchFamily="34" charset="0"/>
         <a:buChar char="●"/>
         <a:defRPr sz="1325" u="none" strike="noStrike" kern="1200" cap="none" spc="150" normalizeH="0" baseline="0">
           <a:solidFill>
@@ -2875,7 +2875,7 @@
         <a:spcAft>
           <a:spcPts val="300"/>
         </a:spcAft>
-        <a:buFont typeface="Arial" panose="020B0604020202020204" pitchFamily="34" charset="0"/>
+        <a:buFont typeface="Arial" panose="020B0704020202020204" pitchFamily="34" charset="0"/>
         <a:buChar char="•"/>
         <a:defRPr sz="1155" u="none" strike="noStrike" kern="1200" cap="none" spc="150" normalizeH="0" baseline="0">
           <a:solidFill>
@@ -2897,7 +2897,7 @@
         <a:spcBef>
           <a:spcPct val="83000"/>
         </a:spcBef>
-        <a:buFont typeface="Arial" panose="020B0604020202020204" pitchFamily="34" charset="0"/>
+        <a:buFont typeface="Arial" panose="020B0704020202020204" pitchFamily="34" charset="0"/>
         <a:buChar char="•"/>
         <a:defRPr sz="1490" kern="1200">
           <a:solidFill>
@@ -2915,7 +2915,7 @@
         <a:spcBef>
           <a:spcPct val="83000"/>
         </a:spcBef>
-        <a:buFont typeface="Arial" panose="020B0604020202020204" pitchFamily="34" charset="0"/>
+        <a:buFont typeface="Arial" panose="020B0704020202020204" pitchFamily="34" charset="0"/>
         <a:buChar char="•"/>
         <a:defRPr sz="1490" kern="1200">
           <a:solidFill>
@@ -2933,7 +2933,7 @@
         <a:spcBef>
           <a:spcPct val="83000"/>
         </a:spcBef>
-        <a:buFont typeface="Arial" panose="020B0604020202020204" pitchFamily="34" charset="0"/>
+        <a:buFont typeface="Arial" panose="020B0704020202020204" pitchFamily="34" charset="0"/>
         <a:buChar char="•"/>
         <a:defRPr sz="1490" kern="1200">
           <a:solidFill>
@@ -2951,7 +2951,7 @@
         <a:spcBef>
           <a:spcPct val="83000"/>
         </a:spcBef>
-        <a:buFont typeface="Arial" panose="020B0604020202020204" pitchFamily="34" charset="0"/>
+        <a:buFont typeface="Arial" panose="020B0704020202020204" pitchFamily="34" charset="0"/>
         <a:buChar char="•"/>
         <a:defRPr sz="1490" kern="1200">
           <a:solidFill>
@@ -3079,9 +3079,33 @@
           <a:chExt cx="0" cy="0"/>
         </a:xfrm>
       </p:grpSpPr>
+      <p:pic>
+        <p:nvPicPr>
+          <p:cNvPr id="2" name="图片 1" descr="5元水票正面"/>
+          <p:cNvPicPr>
+            <a:picLocks noChangeAspect="1"/>
+          </p:cNvPicPr>
+          <p:nvPr/>
+        </p:nvPicPr>
+        <p:blipFill>
+          <a:blip r:embed="rId1"/>
+          <a:stretch>
+            <a:fillRect/>
+          </a:stretch>
+        </p:blipFill>
+        <p:spPr>
+          <a:xfrm>
+            <a:off x="0" y="12700"/>
+            <a:ext cx="3240000" cy="1952709"/>
+          </a:xfrm>
+          <a:prstGeom prst="rect">
+            <a:avLst/>
+          </a:prstGeom>
+        </p:spPr>
+      </p:pic>
     </p:spTree>
     <p:custDataLst>
-      <p:tags r:id="rId1"/>
+      <p:tags r:id="rId2"/>
     </p:custDataLst>
   </p:cSld>
   <p:clrMapOvr>

--- a/SSF/水票.pptx
+++ b/SSF/水票.pptx
@@ -5,7 +5,10 @@
     <p:sldMasterId id="2147483648" r:id="rId1"/>
   </p:sldMasterIdLst>
   <p:sldIdLst>
-    <p:sldId id="256" r:id="rId3"/>
+    <p:sldId id="257" r:id="rId3"/>
+    <p:sldId id="256" r:id="rId4"/>
+    <p:sldId id="258" r:id="rId5"/>
+    <p:sldId id="259" r:id="rId6"/>
   </p:sldIdLst>
   <p:sldSz cx="7559675" cy="10691495"/>
   <p:notesSz cx="6858000" cy="9144000"/>
@@ -2769,7 +2772,7 @@
         <a:spcAft>
           <a:spcPts val="1000"/>
         </a:spcAft>
-        <a:buFont typeface="Arial" panose="020B0704020202020204" pitchFamily="34" charset="0"/>
+        <a:buFont typeface="Arial" panose="020B0604020202020204" pitchFamily="34" charset="0"/>
         <a:buChar char="●"/>
         <a:defRPr sz="1490" u="none" strike="noStrike" kern="1200" cap="none" spc="150" normalizeH="0" baseline="0">
           <a:solidFill>
@@ -2794,7 +2797,7 @@
         <a:spcAft>
           <a:spcPts val="600"/>
         </a:spcAft>
-        <a:buFont typeface="Arial" panose="020B0704020202020204" pitchFamily="34" charset="0"/>
+        <a:buFont typeface="Arial" panose="020B0604020202020204" pitchFamily="34" charset="0"/>
         <a:buChar char="●"/>
         <a:tabLst>
           <a:tab pos="1330960" algn="l"/>
@@ -2825,7 +2828,7 @@
         <a:spcAft>
           <a:spcPts val="600"/>
         </a:spcAft>
-        <a:buFont typeface="Arial" panose="020B0704020202020204" pitchFamily="34" charset="0"/>
+        <a:buFont typeface="Arial" panose="020B0604020202020204" pitchFamily="34" charset="0"/>
         <a:buChar char="●"/>
         <a:defRPr sz="1325" u="none" strike="noStrike" kern="1200" cap="none" spc="150" normalizeH="0" baseline="0">
           <a:solidFill>
@@ -2875,7 +2878,7 @@
         <a:spcAft>
           <a:spcPts val="300"/>
         </a:spcAft>
-        <a:buFont typeface="Arial" panose="020B0704020202020204" pitchFamily="34" charset="0"/>
+        <a:buFont typeface="Arial" panose="020B0604020202020204" pitchFamily="34" charset="0"/>
         <a:buChar char="•"/>
         <a:defRPr sz="1155" u="none" strike="noStrike" kern="1200" cap="none" spc="150" normalizeH="0" baseline="0">
           <a:solidFill>
@@ -2897,7 +2900,7 @@
         <a:spcBef>
           <a:spcPct val="83000"/>
         </a:spcBef>
-        <a:buFont typeface="Arial" panose="020B0704020202020204" pitchFamily="34" charset="0"/>
+        <a:buFont typeface="Arial" panose="020B0604020202020204" pitchFamily="34" charset="0"/>
         <a:buChar char="•"/>
         <a:defRPr sz="1490" kern="1200">
           <a:solidFill>
@@ -2915,7 +2918,7 @@
         <a:spcBef>
           <a:spcPct val="83000"/>
         </a:spcBef>
-        <a:buFont typeface="Arial" panose="020B0704020202020204" pitchFamily="34" charset="0"/>
+        <a:buFont typeface="Arial" panose="020B0604020202020204" pitchFamily="34" charset="0"/>
         <a:buChar char="•"/>
         <a:defRPr sz="1490" kern="1200">
           <a:solidFill>
@@ -2933,7 +2936,7 @@
         <a:spcBef>
           <a:spcPct val="83000"/>
         </a:spcBef>
-        <a:buFont typeface="Arial" panose="020B0704020202020204" pitchFamily="34" charset="0"/>
+        <a:buFont typeface="Arial" panose="020B0604020202020204" pitchFamily="34" charset="0"/>
         <a:buChar char="•"/>
         <a:defRPr sz="1490" kern="1200">
           <a:solidFill>
@@ -2951,7 +2954,7 @@
         <a:spcBef>
           <a:spcPct val="83000"/>
         </a:spcBef>
-        <a:buFont typeface="Arial" panose="020B0704020202020204" pitchFamily="34" charset="0"/>
+        <a:buFont typeface="Arial" panose="020B0604020202020204" pitchFamily="34" charset="0"/>
         <a:buChar char="•"/>
         <a:defRPr sz="1490" kern="1200">
           <a:solidFill>
@@ -3079,30 +3082,241 @@
           <a:chExt cx="0" cy="0"/>
         </a:xfrm>
       </p:grpSpPr>
-      <p:pic>
-        <p:nvPicPr>
-          <p:cNvPr id="2" name="图片 1" descr="5元水票正面"/>
-          <p:cNvPicPr>
-            <a:picLocks noChangeAspect="1"/>
-          </p:cNvPicPr>
+      <p:grpSp>
+        <p:nvGrpSpPr>
+          <p:cNvPr id="2" name="组合 1"/>
+          <p:cNvGrpSpPr/>
           <p:nvPr/>
-        </p:nvPicPr>
-        <p:blipFill>
-          <a:blip r:embed="rId1"/>
-          <a:stretch>
-            <a:fillRect/>
-          </a:stretch>
-        </p:blipFill>
-        <p:spPr>
+        </p:nvGrpSpPr>
+        <p:grpSpPr>
           <a:xfrm>
-            <a:off x="0" y="12700"/>
-            <a:ext cx="3240000" cy="1952709"/>
+            <a:off x="539750" y="484823"/>
+            <a:ext cx="6480175" cy="9721850"/>
+            <a:chOff x="850" y="765"/>
+            <a:chExt cx="10205" cy="15310"/>
           </a:xfrm>
-          <a:prstGeom prst="rect">
-            <a:avLst/>
-          </a:prstGeom>
-        </p:spPr>
-      </p:pic>
+        </p:grpSpPr>
+        <p:pic>
+          <p:nvPicPr>
+            <p:cNvPr id="3" name="图片 2" descr="5元水票正面"/>
+            <p:cNvPicPr/>
+            <p:nvPr/>
+          </p:nvPicPr>
+          <p:blipFill>
+            <a:blip r:embed="rId1"/>
+            <a:stretch>
+              <a:fillRect/>
+            </a:stretch>
+          </p:blipFill>
+          <p:spPr>
+            <a:xfrm>
+              <a:off x="850" y="765"/>
+              <a:ext cx="5102" cy="3064"/>
+            </a:xfrm>
+            <a:prstGeom prst="rect">
+              <a:avLst/>
+            </a:prstGeom>
+          </p:spPr>
+        </p:pic>
+        <p:pic>
+          <p:nvPicPr>
+            <p:cNvPr id="4" name="图片 3" descr="5元水票正面"/>
+            <p:cNvPicPr/>
+            <p:nvPr/>
+          </p:nvPicPr>
+          <p:blipFill>
+            <a:blip r:embed="rId1"/>
+            <a:stretch>
+              <a:fillRect/>
+            </a:stretch>
+          </p:blipFill>
+          <p:spPr>
+            <a:xfrm>
+              <a:off x="5953" y="765"/>
+              <a:ext cx="5102" cy="3064"/>
+            </a:xfrm>
+            <a:prstGeom prst="rect">
+              <a:avLst/>
+            </a:prstGeom>
+          </p:spPr>
+        </p:pic>
+        <p:pic>
+          <p:nvPicPr>
+            <p:cNvPr id="5" name="图片 4" descr="5元水票正面"/>
+            <p:cNvPicPr/>
+            <p:nvPr/>
+          </p:nvPicPr>
+          <p:blipFill>
+            <a:blip r:embed="rId1"/>
+            <a:stretch>
+              <a:fillRect/>
+            </a:stretch>
+          </p:blipFill>
+          <p:spPr>
+            <a:xfrm>
+              <a:off x="850" y="3827"/>
+              <a:ext cx="5102" cy="3064"/>
+            </a:xfrm>
+            <a:prstGeom prst="rect">
+              <a:avLst/>
+            </a:prstGeom>
+          </p:spPr>
+        </p:pic>
+        <p:pic>
+          <p:nvPicPr>
+            <p:cNvPr id="6" name="图片 5" descr="5元水票正面"/>
+            <p:cNvPicPr/>
+            <p:nvPr/>
+          </p:nvPicPr>
+          <p:blipFill>
+            <a:blip r:embed="rId1"/>
+            <a:stretch>
+              <a:fillRect/>
+            </a:stretch>
+          </p:blipFill>
+          <p:spPr>
+            <a:xfrm>
+              <a:off x="850" y="6888"/>
+              <a:ext cx="5102" cy="3064"/>
+            </a:xfrm>
+            <a:prstGeom prst="rect">
+              <a:avLst/>
+            </a:prstGeom>
+          </p:spPr>
+        </p:pic>
+        <p:pic>
+          <p:nvPicPr>
+            <p:cNvPr id="7" name="图片 6" descr="5元水票正面"/>
+            <p:cNvPicPr/>
+            <p:nvPr/>
+          </p:nvPicPr>
+          <p:blipFill>
+            <a:blip r:embed="rId1"/>
+            <a:stretch>
+              <a:fillRect/>
+            </a:stretch>
+          </p:blipFill>
+          <p:spPr>
+            <a:xfrm>
+              <a:off x="850" y="9950"/>
+              <a:ext cx="5102" cy="3064"/>
+            </a:xfrm>
+            <a:prstGeom prst="rect">
+              <a:avLst/>
+            </a:prstGeom>
+          </p:spPr>
+        </p:pic>
+        <p:pic>
+          <p:nvPicPr>
+            <p:cNvPr id="8" name="图片 7" descr="5元水票正面"/>
+            <p:cNvPicPr/>
+            <p:nvPr/>
+          </p:nvPicPr>
+          <p:blipFill>
+            <a:blip r:embed="rId1"/>
+            <a:stretch>
+              <a:fillRect/>
+            </a:stretch>
+          </p:blipFill>
+          <p:spPr>
+            <a:xfrm>
+              <a:off x="850" y="13011"/>
+              <a:ext cx="5102" cy="3064"/>
+            </a:xfrm>
+            <a:prstGeom prst="rect">
+              <a:avLst/>
+            </a:prstGeom>
+          </p:spPr>
+        </p:pic>
+        <p:pic>
+          <p:nvPicPr>
+            <p:cNvPr id="9" name="图片 8" descr="5元水票正面"/>
+            <p:cNvPicPr/>
+            <p:nvPr/>
+          </p:nvPicPr>
+          <p:blipFill>
+            <a:blip r:embed="rId1"/>
+            <a:stretch>
+              <a:fillRect/>
+            </a:stretch>
+          </p:blipFill>
+          <p:spPr>
+            <a:xfrm>
+              <a:off x="5953" y="3827"/>
+              <a:ext cx="5102" cy="3064"/>
+            </a:xfrm>
+            <a:prstGeom prst="rect">
+              <a:avLst/>
+            </a:prstGeom>
+          </p:spPr>
+        </p:pic>
+        <p:pic>
+          <p:nvPicPr>
+            <p:cNvPr id="10" name="图片 9" descr="5元水票正面"/>
+            <p:cNvPicPr/>
+            <p:nvPr/>
+          </p:nvPicPr>
+          <p:blipFill>
+            <a:blip r:embed="rId1"/>
+            <a:stretch>
+              <a:fillRect/>
+            </a:stretch>
+          </p:blipFill>
+          <p:spPr>
+            <a:xfrm>
+              <a:off x="5953" y="6888"/>
+              <a:ext cx="5102" cy="3064"/>
+            </a:xfrm>
+            <a:prstGeom prst="rect">
+              <a:avLst/>
+            </a:prstGeom>
+          </p:spPr>
+        </p:pic>
+        <p:pic>
+          <p:nvPicPr>
+            <p:cNvPr id="11" name="图片 10" descr="5元水票正面"/>
+            <p:cNvPicPr/>
+            <p:nvPr/>
+          </p:nvPicPr>
+          <p:blipFill>
+            <a:blip r:embed="rId1"/>
+            <a:stretch>
+              <a:fillRect/>
+            </a:stretch>
+          </p:blipFill>
+          <p:spPr>
+            <a:xfrm>
+              <a:off x="5953" y="9950"/>
+              <a:ext cx="5102" cy="3064"/>
+            </a:xfrm>
+            <a:prstGeom prst="rect">
+              <a:avLst/>
+            </a:prstGeom>
+          </p:spPr>
+        </p:pic>
+        <p:pic>
+          <p:nvPicPr>
+            <p:cNvPr id="12" name="图片 11" descr="5元水票正面"/>
+            <p:cNvPicPr/>
+            <p:nvPr/>
+          </p:nvPicPr>
+          <p:blipFill>
+            <a:blip r:embed="rId1"/>
+            <a:stretch>
+              <a:fillRect/>
+            </a:stretch>
+          </p:blipFill>
+          <p:spPr>
+            <a:xfrm>
+              <a:off x="5953" y="13011"/>
+              <a:ext cx="5102" cy="3064"/>
+            </a:xfrm>
+            <a:prstGeom prst="rect">
+              <a:avLst/>
+            </a:prstGeom>
+          </p:spPr>
+        </p:pic>
+      </p:grpSp>
     </p:spTree>
     <p:custDataLst>
       <p:tags r:id="rId2"/>
@@ -3114,6 +3328,815 @@
 </p:sld>
 </file>
 
+<file path=ppt/slides/slide2.xml><?xml version="1.0" encoding="utf-8"?>
+<p:sld xmlns:a="http://schemas.openxmlformats.org/drawingml/2006/main" xmlns:r="http://schemas.openxmlformats.org/officeDocument/2006/relationships" xmlns:p="http://schemas.openxmlformats.org/presentationml/2006/main">
+  <p:cSld>
+    <p:spTree>
+      <p:nvGrpSpPr>
+        <p:cNvPr id="1" name=""/>
+        <p:cNvGrpSpPr/>
+        <p:nvPr/>
+      </p:nvGrpSpPr>
+      <p:grpSpPr>
+        <a:xfrm>
+          <a:off x="0" y="0"/>
+          <a:ext cx="0" cy="0"/>
+          <a:chOff x="0" y="0"/>
+          <a:chExt cx="0" cy="0"/>
+        </a:xfrm>
+      </p:grpSpPr>
+      <p:grpSp>
+        <p:nvGrpSpPr>
+          <p:cNvPr id="23" name="组合 22"/>
+          <p:cNvGrpSpPr/>
+          <p:nvPr/>
+        </p:nvGrpSpPr>
+        <p:grpSpPr>
+          <a:xfrm>
+            <a:off x="539952" y="485642"/>
+            <a:ext cx="6479770" cy="9720210"/>
+            <a:chOff x="851" y="769"/>
+            <a:chExt cx="10204" cy="15307"/>
+          </a:xfrm>
+        </p:grpSpPr>
+        <p:pic>
+          <p:nvPicPr>
+            <p:cNvPr id="13" name="图片 12" descr="5元水票背面"/>
+            <p:cNvPicPr/>
+            <p:nvPr/>
+          </p:nvPicPr>
+          <p:blipFill>
+            <a:blip r:embed="rId1"/>
+            <a:stretch>
+              <a:fillRect/>
+            </a:stretch>
+          </p:blipFill>
+          <p:spPr>
+            <a:xfrm>
+              <a:off x="851" y="769"/>
+              <a:ext cx="5102" cy="3061"/>
+            </a:xfrm>
+            <a:prstGeom prst="rect">
+              <a:avLst/>
+            </a:prstGeom>
+          </p:spPr>
+        </p:pic>
+        <p:pic>
+          <p:nvPicPr>
+            <p:cNvPr id="14" name="图片 13" descr="5元水票背面"/>
+            <p:cNvPicPr/>
+            <p:nvPr/>
+          </p:nvPicPr>
+          <p:blipFill>
+            <a:blip r:embed="rId1"/>
+            <a:stretch>
+              <a:fillRect/>
+            </a:stretch>
+          </p:blipFill>
+          <p:spPr>
+            <a:xfrm>
+              <a:off x="5953" y="769"/>
+              <a:ext cx="5102" cy="3061"/>
+            </a:xfrm>
+            <a:prstGeom prst="rect">
+              <a:avLst/>
+            </a:prstGeom>
+          </p:spPr>
+        </p:pic>
+        <p:pic>
+          <p:nvPicPr>
+            <p:cNvPr id="15" name="图片 14" descr="5元水票背面"/>
+            <p:cNvPicPr/>
+            <p:nvPr/>
+          </p:nvPicPr>
+          <p:blipFill>
+            <a:blip r:embed="rId1"/>
+            <a:stretch>
+              <a:fillRect/>
+            </a:stretch>
+          </p:blipFill>
+          <p:spPr>
+            <a:xfrm>
+              <a:off x="851" y="3831"/>
+              <a:ext cx="5102" cy="3061"/>
+            </a:xfrm>
+            <a:prstGeom prst="rect">
+              <a:avLst/>
+            </a:prstGeom>
+          </p:spPr>
+        </p:pic>
+        <p:pic>
+          <p:nvPicPr>
+            <p:cNvPr id="16" name="图片 15" descr="5元水票背面"/>
+            <p:cNvPicPr/>
+            <p:nvPr/>
+          </p:nvPicPr>
+          <p:blipFill>
+            <a:blip r:embed="rId1"/>
+            <a:stretch>
+              <a:fillRect/>
+            </a:stretch>
+          </p:blipFill>
+          <p:spPr>
+            <a:xfrm>
+              <a:off x="5953" y="3831"/>
+              <a:ext cx="5102" cy="3061"/>
+            </a:xfrm>
+            <a:prstGeom prst="rect">
+              <a:avLst/>
+            </a:prstGeom>
+          </p:spPr>
+        </p:pic>
+        <p:pic>
+          <p:nvPicPr>
+            <p:cNvPr id="17" name="图片 16" descr="5元水票背面"/>
+            <p:cNvPicPr/>
+            <p:nvPr/>
+          </p:nvPicPr>
+          <p:blipFill>
+            <a:blip r:embed="rId1"/>
+            <a:stretch>
+              <a:fillRect/>
+            </a:stretch>
+          </p:blipFill>
+          <p:spPr>
+            <a:xfrm>
+              <a:off x="851" y="6892"/>
+              <a:ext cx="5102" cy="3061"/>
+            </a:xfrm>
+            <a:prstGeom prst="rect">
+              <a:avLst/>
+            </a:prstGeom>
+          </p:spPr>
+        </p:pic>
+        <p:pic>
+          <p:nvPicPr>
+            <p:cNvPr id="18" name="图片 17" descr="5元水票背面"/>
+            <p:cNvPicPr/>
+            <p:nvPr/>
+          </p:nvPicPr>
+          <p:blipFill>
+            <a:blip r:embed="rId1"/>
+            <a:stretch>
+              <a:fillRect/>
+            </a:stretch>
+          </p:blipFill>
+          <p:spPr>
+            <a:xfrm>
+              <a:off x="5953" y="6892"/>
+              <a:ext cx="5102" cy="3061"/>
+            </a:xfrm>
+            <a:prstGeom prst="rect">
+              <a:avLst/>
+            </a:prstGeom>
+          </p:spPr>
+        </p:pic>
+        <p:pic>
+          <p:nvPicPr>
+            <p:cNvPr id="19" name="图片 18" descr="5元水票背面"/>
+            <p:cNvPicPr/>
+            <p:nvPr/>
+          </p:nvPicPr>
+          <p:blipFill>
+            <a:blip r:embed="rId1"/>
+            <a:stretch>
+              <a:fillRect/>
+            </a:stretch>
+          </p:blipFill>
+          <p:spPr>
+            <a:xfrm>
+              <a:off x="851" y="9954"/>
+              <a:ext cx="5102" cy="3061"/>
+            </a:xfrm>
+            <a:prstGeom prst="rect">
+              <a:avLst/>
+            </a:prstGeom>
+          </p:spPr>
+        </p:pic>
+        <p:pic>
+          <p:nvPicPr>
+            <p:cNvPr id="20" name="图片 19" descr="5元水票背面"/>
+            <p:cNvPicPr/>
+            <p:nvPr/>
+          </p:nvPicPr>
+          <p:blipFill>
+            <a:blip r:embed="rId1"/>
+            <a:stretch>
+              <a:fillRect/>
+            </a:stretch>
+          </p:blipFill>
+          <p:spPr>
+            <a:xfrm>
+              <a:off x="5953" y="9954"/>
+              <a:ext cx="5102" cy="3061"/>
+            </a:xfrm>
+            <a:prstGeom prst="rect">
+              <a:avLst/>
+            </a:prstGeom>
+          </p:spPr>
+        </p:pic>
+        <p:pic>
+          <p:nvPicPr>
+            <p:cNvPr id="21" name="图片 20" descr="5元水票背面"/>
+            <p:cNvPicPr/>
+            <p:nvPr/>
+          </p:nvPicPr>
+          <p:blipFill>
+            <a:blip r:embed="rId1"/>
+            <a:stretch>
+              <a:fillRect/>
+            </a:stretch>
+          </p:blipFill>
+          <p:spPr>
+            <a:xfrm>
+              <a:off x="851" y="13015"/>
+              <a:ext cx="5102" cy="3061"/>
+            </a:xfrm>
+            <a:prstGeom prst="rect">
+              <a:avLst/>
+            </a:prstGeom>
+          </p:spPr>
+        </p:pic>
+        <p:pic>
+          <p:nvPicPr>
+            <p:cNvPr id="22" name="图片 21" descr="5元水票背面"/>
+            <p:cNvPicPr/>
+            <p:nvPr/>
+          </p:nvPicPr>
+          <p:blipFill>
+            <a:blip r:embed="rId1"/>
+            <a:stretch>
+              <a:fillRect/>
+            </a:stretch>
+          </p:blipFill>
+          <p:spPr>
+            <a:xfrm>
+              <a:off x="5953" y="13015"/>
+              <a:ext cx="5102" cy="3061"/>
+            </a:xfrm>
+            <a:prstGeom prst="rect">
+              <a:avLst/>
+            </a:prstGeom>
+          </p:spPr>
+        </p:pic>
+      </p:grpSp>
+    </p:spTree>
+    <p:custDataLst>
+      <p:tags r:id="rId2"/>
+    </p:custDataLst>
+  </p:cSld>
+  <p:clrMapOvr>
+    <a:masterClrMapping/>
+  </p:clrMapOvr>
+</p:sld>
+</file>
+
+<file path=ppt/slides/slide3.xml><?xml version="1.0" encoding="utf-8"?>
+<p:sld xmlns:a="http://schemas.openxmlformats.org/drawingml/2006/main" xmlns:r="http://schemas.openxmlformats.org/officeDocument/2006/relationships" xmlns:p="http://schemas.openxmlformats.org/presentationml/2006/main">
+  <p:cSld>
+    <p:spTree>
+      <p:nvGrpSpPr>
+        <p:cNvPr id="1" name=""/>
+        <p:cNvGrpSpPr/>
+        <p:nvPr/>
+      </p:nvGrpSpPr>
+      <p:grpSpPr>
+        <a:xfrm>
+          <a:off x="0" y="0"/>
+          <a:ext cx="0" cy="0"/>
+          <a:chOff x="0" y="0"/>
+          <a:chExt cx="0" cy="0"/>
+        </a:xfrm>
+      </p:grpSpPr>
+      <p:grpSp>
+        <p:nvGrpSpPr>
+          <p:cNvPr id="2" name="组合 1"/>
+          <p:cNvGrpSpPr/>
+          <p:nvPr/>
+        </p:nvGrpSpPr>
+        <p:grpSpPr>
+          <a:xfrm>
+            <a:off x="539750" y="484823"/>
+            <a:ext cx="6480175" cy="9721850"/>
+            <a:chOff x="850" y="765"/>
+            <a:chExt cx="10205" cy="15310"/>
+          </a:xfrm>
+        </p:grpSpPr>
+        <p:pic>
+          <p:nvPicPr>
+            <p:cNvPr id="3" name="图片 2" descr="G:/Iot-svg-library/SSF/7元水票正面.png7元水票正面"/>
+            <p:cNvPicPr/>
+            <p:nvPr/>
+          </p:nvPicPr>
+          <p:blipFill>
+            <a:blip r:embed="rId1"/>
+            <a:srcRect t="137" b="137"/>
+            <a:stretch>
+              <a:fillRect/>
+            </a:stretch>
+          </p:blipFill>
+          <p:spPr>
+            <a:xfrm>
+              <a:off x="850" y="765"/>
+              <a:ext cx="5102" cy="3064"/>
+            </a:xfrm>
+            <a:prstGeom prst="rect">
+              <a:avLst/>
+            </a:prstGeom>
+          </p:spPr>
+        </p:pic>
+        <p:pic>
+          <p:nvPicPr>
+            <p:cNvPr id="4" name="图片 3" descr="G:/Iot-svg-library/SSF/7元水票正面.png7元水票正面"/>
+            <p:cNvPicPr/>
+            <p:nvPr/>
+          </p:nvPicPr>
+          <p:blipFill>
+            <a:blip r:embed="rId1"/>
+            <a:srcRect t="137" b="137"/>
+            <a:stretch>
+              <a:fillRect/>
+            </a:stretch>
+          </p:blipFill>
+          <p:spPr>
+            <a:xfrm>
+              <a:off x="5953" y="765"/>
+              <a:ext cx="5102" cy="3064"/>
+            </a:xfrm>
+            <a:prstGeom prst="rect">
+              <a:avLst/>
+            </a:prstGeom>
+          </p:spPr>
+        </p:pic>
+        <p:pic>
+          <p:nvPicPr>
+            <p:cNvPr id="5" name="图片 4" descr="G:/Iot-svg-library/SSF/7元水票正面.png7元水票正面"/>
+            <p:cNvPicPr/>
+            <p:nvPr/>
+          </p:nvPicPr>
+          <p:blipFill>
+            <a:blip r:embed="rId1"/>
+            <a:srcRect t="137" b="137"/>
+            <a:stretch>
+              <a:fillRect/>
+            </a:stretch>
+          </p:blipFill>
+          <p:spPr>
+            <a:xfrm>
+              <a:off x="850" y="3827"/>
+              <a:ext cx="5102" cy="3064"/>
+            </a:xfrm>
+            <a:prstGeom prst="rect">
+              <a:avLst/>
+            </a:prstGeom>
+          </p:spPr>
+        </p:pic>
+        <p:pic>
+          <p:nvPicPr>
+            <p:cNvPr id="6" name="图片 5" descr="G:/Iot-svg-library/SSF/7元水票正面.png7元水票正面"/>
+            <p:cNvPicPr/>
+            <p:nvPr/>
+          </p:nvPicPr>
+          <p:blipFill>
+            <a:blip r:embed="rId1"/>
+            <a:srcRect t="137" b="137"/>
+            <a:stretch>
+              <a:fillRect/>
+            </a:stretch>
+          </p:blipFill>
+          <p:spPr>
+            <a:xfrm>
+              <a:off x="850" y="6888"/>
+              <a:ext cx="5102" cy="3064"/>
+            </a:xfrm>
+            <a:prstGeom prst="rect">
+              <a:avLst/>
+            </a:prstGeom>
+          </p:spPr>
+        </p:pic>
+        <p:pic>
+          <p:nvPicPr>
+            <p:cNvPr id="7" name="图片 6" descr="G:/Iot-svg-library/SSF/7元水票正面.png7元水票正面"/>
+            <p:cNvPicPr/>
+            <p:nvPr/>
+          </p:nvPicPr>
+          <p:blipFill>
+            <a:blip r:embed="rId1"/>
+            <a:srcRect t="137" b="137"/>
+            <a:stretch>
+              <a:fillRect/>
+            </a:stretch>
+          </p:blipFill>
+          <p:spPr>
+            <a:xfrm>
+              <a:off x="850" y="9950"/>
+              <a:ext cx="5102" cy="3064"/>
+            </a:xfrm>
+            <a:prstGeom prst="rect">
+              <a:avLst/>
+            </a:prstGeom>
+          </p:spPr>
+        </p:pic>
+        <p:pic>
+          <p:nvPicPr>
+            <p:cNvPr id="8" name="图片 7" descr="G:/Iot-svg-library/SSF/7元水票正面.png7元水票正面"/>
+            <p:cNvPicPr/>
+            <p:nvPr/>
+          </p:nvPicPr>
+          <p:blipFill>
+            <a:blip r:embed="rId1"/>
+            <a:srcRect t="137" b="137"/>
+            <a:stretch>
+              <a:fillRect/>
+            </a:stretch>
+          </p:blipFill>
+          <p:spPr>
+            <a:xfrm>
+              <a:off x="850" y="13011"/>
+              <a:ext cx="5102" cy="3064"/>
+            </a:xfrm>
+            <a:prstGeom prst="rect">
+              <a:avLst/>
+            </a:prstGeom>
+          </p:spPr>
+        </p:pic>
+        <p:pic>
+          <p:nvPicPr>
+            <p:cNvPr id="9" name="图片 8" descr="G:/Iot-svg-library/SSF/7元水票正面.png7元水票正面"/>
+            <p:cNvPicPr/>
+            <p:nvPr/>
+          </p:nvPicPr>
+          <p:blipFill>
+            <a:blip r:embed="rId1"/>
+            <a:srcRect t="137" b="137"/>
+            <a:stretch>
+              <a:fillRect/>
+            </a:stretch>
+          </p:blipFill>
+          <p:spPr>
+            <a:xfrm>
+              <a:off x="5953" y="3827"/>
+              <a:ext cx="5102" cy="3064"/>
+            </a:xfrm>
+            <a:prstGeom prst="rect">
+              <a:avLst/>
+            </a:prstGeom>
+          </p:spPr>
+        </p:pic>
+        <p:pic>
+          <p:nvPicPr>
+            <p:cNvPr id="10" name="图片 9" descr="G:/Iot-svg-library/SSF/7元水票正面.png7元水票正面"/>
+            <p:cNvPicPr/>
+            <p:nvPr/>
+          </p:nvPicPr>
+          <p:blipFill>
+            <a:blip r:embed="rId1"/>
+            <a:srcRect t="137" b="137"/>
+            <a:stretch>
+              <a:fillRect/>
+            </a:stretch>
+          </p:blipFill>
+          <p:spPr>
+            <a:xfrm>
+              <a:off x="5953" y="6888"/>
+              <a:ext cx="5102" cy="3064"/>
+            </a:xfrm>
+            <a:prstGeom prst="rect">
+              <a:avLst/>
+            </a:prstGeom>
+          </p:spPr>
+        </p:pic>
+        <p:pic>
+          <p:nvPicPr>
+            <p:cNvPr id="11" name="图片 10" descr="G:/Iot-svg-library/SSF/7元水票正面.png7元水票正面"/>
+            <p:cNvPicPr/>
+            <p:nvPr/>
+          </p:nvPicPr>
+          <p:blipFill>
+            <a:blip r:embed="rId1"/>
+            <a:srcRect t="137" b="137"/>
+            <a:stretch>
+              <a:fillRect/>
+            </a:stretch>
+          </p:blipFill>
+          <p:spPr>
+            <a:xfrm>
+              <a:off x="5953" y="9950"/>
+              <a:ext cx="5102" cy="3064"/>
+            </a:xfrm>
+            <a:prstGeom prst="rect">
+              <a:avLst/>
+            </a:prstGeom>
+          </p:spPr>
+        </p:pic>
+        <p:pic>
+          <p:nvPicPr>
+            <p:cNvPr id="12" name="图片 11" descr="G:/Iot-svg-library/SSF/7元水票正面.png7元水票正面"/>
+            <p:cNvPicPr/>
+            <p:nvPr/>
+          </p:nvPicPr>
+          <p:blipFill>
+            <a:blip r:embed="rId1"/>
+            <a:srcRect t="137" b="137"/>
+            <a:stretch>
+              <a:fillRect/>
+            </a:stretch>
+          </p:blipFill>
+          <p:spPr>
+            <a:xfrm>
+              <a:off x="5953" y="13011"/>
+              <a:ext cx="5102" cy="3064"/>
+            </a:xfrm>
+            <a:prstGeom prst="rect">
+              <a:avLst/>
+            </a:prstGeom>
+          </p:spPr>
+        </p:pic>
+      </p:grpSp>
+    </p:spTree>
+    <p:custDataLst>
+      <p:tags r:id="rId2"/>
+    </p:custDataLst>
+  </p:cSld>
+  <p:clrMapOvr>
+    <a:masterClrMapping/>
+  </p:clrMapOvr>
+</p:sld>
+</file>
+
+<file path=ppt/slides/slide4.xml><?xml version="1.0" encoding="utf-8"?>
+<p:sld xmlns:a="http://schemas.openxmlformats.org/drawingml/2006/main" xmlns:r="http://schemas.openxmlformats.org/officeDocument/2006/relationships" xmlns:p="http://schemas.openxmlformats.org/presentationml/2006/main">
+  <p:cSld>
+    <p:spTree>
+      <p:nvGrpSpPr>
+        <p:cNvPr id="1" name=""/>
+        <p:cNvGrpSpPr/>
+        <p:nvPr/>
+      </p:nvGrpSpPr>
+      <p:grpSpPr>
+        <a:xfrm>
+          <a:off x="0" y="0"/>
+          <a:ext cx="0" cy="0"/>
+          <a:chOff x="0" y="0"/>
+          <a:chExt cx="0" cy="0"/>
+        </a:xfrm>
+      </p:grpSpPr>
+      <p:grpSp>
+        <p:nvGrpSpPr>
+          <p:cNvPr id="23" name="组合 22"/>
+          <p:cNvGrpSpPr/>
+          <p:nvPr/>
+        </p:nvGrpSpPr>
+        <p:grpSpPr>
+          <a:xfrm>
+            <a:off x="539952" y="485642"/>
+            <a:ext cx="6479770" cy="9720210"/>
+            <a:chOff x="851" y="769"/>
+            <a:chExt cx="10204" cy="15307"/>
+          </a:xfrm>
+        </p:grpSpPr>
+        <p:pic>
+          <p:nvPicPr>
+            <p:cNvPr id="13" name="图片 12" descr="G:/Iot-svg-library/SSF/7元水票背面.png7元水票背面"/>
+            <p:cNvPicPr/>
+            <p:nvPr/>
+          </p:nvPicPr>
+          <p:blipFill>
+            <a:blip r:embed="rId1"/>
+            <a:srcRect l="212" t="-16" r="212" b="16"/>
+            <a:stretch>
+              <a:fillRect/>
+            </a:stretch>
+          </p:blipFill>
+          <p:spPr>
+            <a:xfrm>
+              <a:off x="851" y="769"/>
+              <a:ext cx="5102" cy="3061"/>
+            </a:xfrm>
+            <a:prstGeom prst="rect">
+              <a:avLst/>
+            </a:prstGeom>
+          </p:spPr>
+        </p:pic>
+        <p:pic>
+          <p:nvPicPr>
+            <p:cNvPr id="14" name="图片 13" descr="G:/Iot-svg-library/SSF/7元水票背面.png7元水票背面"/>
+            <p:cNvPicPr/>
+            <p:nvPr/>
+          </p:nvPicPr>
+          <p:blipFill>
+            <a:blip r:embed="rId1"/>
+            <a:srcRect l="212" t="-16" r="212" b="16"/>
+            <a:stretch>
+              <a:fillRect/>
+            </a:stretch>
+          </p:blipFill>
+          <p:spPr>
+            <a:xfrm>
+              <a:off x="5953" y="769"/>
+              <a:ext cx="5102" cy="3061"/>
+            </a:xfrm>
+            <a:prstGeom prst="rect">
+              <a:avLst/>
+            </a:prstGeom>
+          </p:spPr>
+        </p:pic>
+        <p:pic>
+          <p:nvPicPr>
+            <p:cNvPr id="15" name="图片 14" descr="G:/Iot-svg-library/SSF/7元水票背面.png7元水票背面"/>
+            <p:cNvPicPr/>
+            <p:nvPr/>
+          </p:nvPicPr>
+          <p:blipFill>
+            <a:blip r:embed="rId1"/>
+            <a:srcRect l="212" t="-16" r="212" b="16"/>
+            <a:stretch>
+              <a:fillRect/>
+            </a:stretch>
+          </p:blipFill>
+          <p:spPr>
+            <a:xfrm>
+              <a:off x="851" y="3831"/>
+              <a:ext cx="5102" cy="3061"/>
+            </a:xfrm>
+            <a:prstGeom prst="rect">
+              <a:avLst/>
+            </a:prstGeom>
+          </p:spPr>
+        </p:pic>
+        <p:pic>
+          <p:nvPicPr>
+            <p:cNvPr id="16" name="图片 15" descr="G:/Iot-svg-library/SSF/7元水票背面.png7元水票背面"/>
+            <p:cNvPicPr/>
+            <p:nvPr/>
+          </p:nvPicPr>
+          <p:blipFill>
+            <a:blip r:embed="rId1"/>
+            <a:srcRect l="212" t="-16" r="212" b="16"/>
+            <a:stretch>
+              <a:fillRect/>
+            </a:stretch>
+          </p:blipFill>
+          <p:spPr>
+            <a:xfrm>
+              <a:off x="5953" y="3831"/>
+              <a:ext cx="5102" cy="3061"/>
+            </a:xfrm>
+            <a:prstGeom prst="rect">
+              <a:avLst/>
+            </a:prstGeom>
+          </p:spPr>
+        </p:pic>
+        <p:pic>
+          <p:nvPicPr>
+            <p:cNvPr id="17" name="图片 16" descr="G:/Iot-svg-library/SSF/7元水票背面.png7元水票背面"/>
+            <p:cNvPicPr/>
+            <p:nvPr/>
+          </p:nvPicPr>
+          <p:blipFill>
+            <a:blip r:embed="rId1"/>
+            <a:srcRect l="212" t="-16" r="212" b="16"/>
+            <a:stretch>
+              <a:fillRect/>
+            </a:stretch>
+          </p:blipFill>
+          <p:spPr>
+            <a:xfrm>
+              <a:off x="851" y="6892"/>
+              <a:ext cx="5102" cy="3061"/>
+            </a:xfrm>
+            <a:prstGeom prst="rect">
+              <a:avLst/>
+            </a:prstGeom>
+          </p:spPr>
+        </p:pic>
+        <p:pic>
+          <p:nvPicPr>
+            <p:cNvPr id="18" name="图片 17" descr="G:/Iot-svg-library/SSF/7元水票背面.png7元水票背面"/>
+            <p:cNvPicPr/>
+            <p:nvPr/>
+          </p:nvPicPr>
+          <p:blipFill>
+            <a:blip r:embed="rId1"/>
+            <a:srcRect l="212" t="-16" r="212" b="16"/>
+            <a:stretch>
+              <a:fillRect/>
+            </a:stretch>
+          </p:blipFill>
+          <p:spPr>
+            <a:xfrm>
+              <a:off x="5953" y="6892"/>
+              <a:ext cx="5102" cy="3061"/>
+            </a:xfrm>
+            <a:prstGeom prst="rect">
+              <a:avLst/>
+            </a:prstGeom>
+          </p:spPr>
+        </p:pic>
+        <p:pic>
+          <p:nvPicPr>
+            <p:cNvPr id="19" name="图片 18" descr="G:/Iot-svg-library/SSF/7元水票背面.png7元水票背面"/>
+            <p:cNvPicPr/>
+            <p:nvPr/>
+          </p:nvPicPr>
+          <p:blipFill>
+            <a:blip r:embed="rId1"/>
+            <a:srcRect l="212" t="-16" r="212" b="16"/>
+            <a:stretch>
+              <a:fillRect/>
+            </a:stretch>
+          </p:blipFill>
+          <p:spPr>
+            <a:xfrm>
+              <a:off x="851" y="9954"/>
+              <a:ext cx="5102" cy="3061"/>
+            </a:xfrm>
+            <a:prstGeom prst="rect">
+              <a:avLst/>
+            </a:prstGeom>
+          </p:spPr>
+        </p:pic>
+        <p:pic>
+          <p:nvPicPr>
+            <p:cNvPr id="20" name="图片 19" descr="G:/Iot-svg-library/SSF/7元水票背面.png7元水票背面"/>
+            <p:cNvPicPr/>
+            <p:nvPr/>
+          </p:nvPicPr>
+          <p:blipFill>
+            <a:blip r:embed="rId1"/>
+            <a:srcRect l="212" t="-16" r="212" b="16"/>
+            <a:stretch>
+              <a:fillRect/>
+            </a:stretch>
+          </p:blipFill>
+          <p:spPr>
+            <a:xfrm>
+              <a:off x="5953" y="9954"/>
+              <a:ext cx="5102" cy="3061"/>
+            </a:xfrm>
+            <a:prstGeom prst="rect">
+              <a:avLst/>
+            </a:prstGeom>
+          </p:spPr>
+        </p:pic>
+        <p:pic>
+          <p:nvPicPr>
+            <p:cNvPr id="21" name="图片 20" descr="G:/Iot-svg-library/SSF/7元水票背面.png7元水票背面"/>
+            <p:cNvPicPr/>
+            <p:nvPr/>
+          </p:nvPicPr>
+          <p:blipFill>
+            <a:blip r:embed="rId1"/>
+            <a:srcRect l="212" t="-16" r="212" b="16"/>
+            <a:stretch>
+              <a:fillRect/>
+            </a:stretch>
+          </p:blipFill>
+          <p:spPr>
+            <a:xfrm>
+              <a:off x="851" y="13015"/>
+              <a:ext cx="5102" cy="3061"/>
+            </a:xfrm>
+            <a:prstGeom prst="rect">
+              <a:avLst/>
+            </a:prstGeom>
+          </p:spPr>
+        </p:pic>
+        <p:pic>
+          <p:nvPicPr>
+            <p:cNvPr id="22" name="图片 21" descr="G:/Iot-svg-library/SSF/7元水票背面.png7元水票背面"/>
+            <p:cNvPicPr/>
+            <p:nvPr/>
+          </p:nvPicPr>
+          <p:blipFill>
+            <a:blip r:embed="rId1"/>
+            <a:srcRect l="212" t="-16" r="212" b="16"/>
+            <a:stretch>
+              <a:fillRect/>
+            </a:stretch>
+          </p:blipFill>
+          <p:spPr>
+            <a:xfrm>
+              <a:off x="5953" y="13015"/>
+              <a:ext cx="5102" cy="3061"/>
+            </a:xfrm>
+            <a:prstGeom prst="rect">
+              <a:avLst/>
+            </a:prstGeom>
+          </p:spPr>
+        </p:pic>
+      </p:grpSp>
+    </p:spTree>
+    <p:custDataLst>
+      <p:tags r:id="rId2"/>
+    </p:custDataLst>
+  </p:cSld>
+  <p:clrMapOvr>
+    <a:masterClrMapping/>
+  </p:clrMapOvr>
+</p:sld>
+</file>
+
 <file path=ppt/tags/tag1.xml><?xml version="1.0" encoding="utf-8"?>
 <p:tagLst xmlns:p="http://schemas.openxmlformats.org/presentationml/2006/main">
   <p:tag name="KSO_WM_UNIT_HIGHLIGHT" val="0"/>
@@ -3887,6 +4910,69 @@
 </file>
 
 <file path=ppt/tags/tag63.xml><?xml version="1.0" encoding="utf-8"?>
+<p:tagLst xmlns:p="http://schemas.openxmlformats.org/presentationml/2006/main">
+  <p:tag name="KSO_WM_SLIDE_ID" val="custom20205081_1"/>
+  <p:tag name="KSO_WM_TEMPLATE_SUBCATEGORY" val="19"/>
+  <p:tag name="KSO_WM_TEMPLATE_MASTER_TYPE" val="0"/>
+  <p:tag name="KSO_WM_TEMPLATE_COLOR_TYPE" val="1"/>
+  <p:tag name="KSO_WM_SLIDE_TYPE" val="title"/>
+  <p:tag name="KSO_WM_SLIDE_SUBTYPE" val="defaultBlank"/>
+  <p:tag name="KSO_WM_SLIDE_ITEM_CNT" val="0"/>
+  <p:tag name="KSO_WM_SLIDE_INDEX" val="1"/>
+  <p:tag name="KSO_WM_TAG_VERSION" val="1.0"/>
+  <p:tag name="KSO_WM_BEAUTIFY_FLAG" val="#wm#"/>
+  <p:tag name="KSO_WM_TEMPLATE_CATEGORY" val="custom"/>
+  <p:tag name="KSO_WM_TEMPLATE_INDEX" val="20205081"/>
+  <p:tag name="KSO_WM_SLIDE_LAYOUT" val="a_b"/>
+  <p:tag name="KSO_WM_SLIDE_LAYOUT_CNT" val="1_1"/>
+  <p:tag name="KSO_WM_UNIT_SHOW_EDIT_AREA_INDICATION" val="1"/>
+  <p:tag name="KSO_WM_TEMPLATE_THUMBS_INDEX" val="1、4、7、12、13、14、15、16、17、18、20、24、25、28、33、36、40、43、44"/>
+</p:tagLst>
+</file>
+
+<file path=ppt/tags/tag64.xml><?xml version="1.0" encoding="utf-8"?>
+<p:tagLst xmlns:p="http://schemas.openxmlformats.org/presentationml/2006/main">
+  <p:tag name="KSO_WM_SLIDE_ID" val="custom20205081_1"/>
+  <p:tag name="KSO_WM_TEMPLATE_SUBCATEGORY" val="19"/>
+  <p:tag name="KSO_WM_TEMPLATE_MASTER_TYPE" val="0"/>
+  <p:tag name="KSO_WM_TEMPLATE_COLOR_TYPE" val="1"/>
+  <p:tag name="KSO_WM_SLIDE_TYPE" val="title"/>
+  <p:tag name="KSO_WM_SLIDE_SUBTYPE" val="defaultBlank"/>
+  <p:tag name="KSO_WM_SLIDE_ITEM_CNT" val="0"/>
+  <p:tag name="KSO_WM_SLIDE_INDEX" val="1"/>
+  <p:tag name="KSO_WM_TAG_VERSION" val="1.0"/>
+  <p:tag name="KSO_WM_BEAUTIFY_FLAG" val="#wm#"/>
+  <p:tag name="KSO_WM_TEMPLATE_CATEGORY" val="custom"/>
+  <p:tag name="KSO_WM_TEMPLATE_INDEX" val="20205081"/>
+  <p:tag name="KSO_WM_SLIDE_LAYOUT" val="a_b"/>
+  <p:tag name="KSO_WM_SLIDE_LAYOUT_CNT" val="1_1"/>
+  <p:tag name="KSO_WM_UNIT_SHOW_EDIT_AREA_INDICATION" val="1"/>
+  <p:tag name="KSO_WM_TEMPLATE_THUMBS_INDEX" val="1、4、7、12、13、14、15、16、17、18、20、24、25、28、33、36、40、43、44"/>
+</p:tagLst>
+</file>
+
+<file path=ppt/tags/tag65.xml><?xml version="1.0" encoding="utf-8"?>
+<p:tagLst xmlns:p="http://schemas.openxmlformats.org/presentationml/2006/main">
+  <p:tag name="KSO_WM_SLIDE_ID" val="custom20205081_1"/>
+  <p:tag name="KSO_WM_TEMPLATE_SUBCATEGORY" val="19"/>
+  <p:tag name="KSO_WM_TEMPLATE_MASTER_TYPE" val="0"/>
+  <p:tag name="KSO_WM_TEMPLATE_COLOR_TYPE" val="1"/>
+  <p:tag name="KSO_WM_SLIDE_TYPE" val="title"/>
+  <p:tag name="KSO_WM_SLIDE_SUBTYPE" val="defaultBlank"/>
+  <p:tag name="KSO_WM_SLIDE_ITEM_CNT" val="0"/>
+  <p:tag name="KSO_WM_SLIDE_INDEX" val="1"/>
+  <p:tag name="KSO_WM_TAG_VERSION" val="1.0"/>
+  <p:tag name="KSO_WM_BEAUTIFY_FLAG" val="#wm#"/>
+  <p:tag name="KSO_WM_TEMPLATE_CATEGORY" val="custom"/>
+  <p:tag name="KSO_WM_TEMPLATE_INDEX" val="20205081"/>
+  <p:tag name="KSO_WM_SLIDE_LAYOUT" val="a_b"/>
+  <p:tag name="KSO_WM_SLIDE_LAYOUT_CNT" val="1_1"/>
+  <p:tag name="KSO_WM_UNIT_SHOW_EDIT_AREA_INDICATION" val="1"/>
+  <p:tag name="KSO_WM_TEMPLATE_THUMBS_INDEX" val="1、4、7、12、13、14、15、16、17、18、20、24、25、28、33、36、40、43、44"/>
+</p:tagLst>
+</file>
+
+<file path=ppt/tags/tag66.xml><?xml version="1.0" encoding="utf-8"?>
 <p:tagLst xmlns:p="http://schemas.openxmlformats.org/presentationml/2006/main">
   <p:tag name="KSO_WM_SLIDE_ID" val="custom20205081_1"/>
   <p:tag name="KSO_WM_TEMPLATE_SUBCATEGORY" val="19"/>
